--- a/Day4_Likelihood_BayesI/FW536_Day4_Morning_maximum likelihod.pptx
+++ b/Day4_Likelihood_BayesI/FW536_Day4_Morning_maximum likelihod.pptx
@@ -18616,7 +18616,7 @@
                   <a:srgbClr val="000000"/>
                 </a:solidFill>
               </a:rPr>
-              <a:t>	longer blow times)?</a:t>
+              <a:t>	higher blow rate)?</a:t>
             </a:r>
           </a:p>
           <a:p>
@@ -18644,7 +18644,7 @@
                   <a:srgbClr val="000000"/>
                 </a:solidFill>
               </a:rPr>
-              <a:t>      length of blow?</a:t>
+              <a:t>      blow rate?</a:t>
             </a:r>
           </a:p>
           <a:p>
